--- a/system-design-101/vi/lessons/sd-11-014/slides/sd-11-014.pptx
+++ b/system-design-101/vi/lessons/sd-11-014/slides/sd-11-014.pptx
@@ -12276,7 +12276,7 @@
               <a:t> ở</a:t>
             </a:r>
             <a:r>
-              <a:rPr lang="en-US" sz="3300" b="1" dirty="0" spc="-9" kern="0">
+              <a:rPr lang="en-US" sz="3300" b="1" dirty="0" spc="-2" kern="0">
                 <a:solidFill>
                   <a:srgbClr val="F3EEE3"/>
                 </a:solidFill>
@@ -12284,7 +12284,18 @@
                 <a:ea typeface="Be Vietnam Pro" pitchFamily="34" charset="-122"/>
                 <a:cs typeface="Be Vietnam Pro" pitchFamily="34" charset="-120"/>
               </a:rPr>
-              <a:t> tầng</a:t>
+              <a:t> dịch</a:t>
+            </a:r>
+            <a:r>
+              <a:rPr lang="en-US" sz="3300" b="1" dirty="0" spc="-3" kern="0">
+                <a:solidFill>
+                  <a:srgbClr val="F3EEE3"/>
+                </a:solidFill>
+                <a:latin typeface="Be Vietnam Pro" pitchFamily="34" charset="0"/>
+                <a:ea typeface="Be Vietnam Pro" pitchFamily="34" charset="-122"/>
+                <a:cs typeface="Be Vietnam Pro" pitchFamily="34" charset="-120"/>
+              </a:rPr>
+              <a:t> vụ</a:t>
             </a:r>
             <a:r>
               <a:rPr lang="en-US" sz="3300" b="1" dirty="0" spc="0" kern="0">
@@ -12298,7 +12309,7 @@
               <a:t> cuối</a:t>
             </a:r>
             <a:r>
-              <a:rPr lang="en-US" sz="3300" b="1" dirty="0" spc="-9" kern="0">
+              <a:rPr lang="en-US" sz="3300" b="1" dirty="0" spc="-8" kern="0">
                 <a:solidFill>
                   <a:srgbClr val="F3EEE3"/>
                 </a:solidFill>
@@ -12306,7 +12317,73 @@
                 <a:ea typeface="Be Vietnam Pro" pitchFamily="34" charset="-122"/>
                 <a:cs typeface="Be Vietnam Pro" pitchFamily="34" charset="-120"/>
               </a:rPr>
-              <a:t> cho</a:t>
+              <a:t> cho mỗi</a:t>
+            </a:r>
+            <a:r>
+              <a:rPr lang="en-US" sz="3300" b="1" dirty="0" spc="-27" kern="0">
+                <a:solidFill>
+                  <a:srgbClr val="F3EEE3"/>
+                </a:solidFill>
+                <a:latin typeface="Be Vietnam Pro" pitchFamily="34" charset="0"/>
+                <a:ea typeface="Be Vietnam Pro" pitchFamily="34" charset="-122"/>
+                <a:cs typeface="Be Vietnam Pro" pitchFamily="34" charset="-120"/>
+              </a:rPr>
+              <a:t> yêu</a:t>
+            </a:r>
+            <a:r>
+              <a:rPr lang="en-US" sz="3300" b="1" dirty="0" spc="1" kern="0">
+                <a:solidFill>
+                  <a:srgbClr val="F3EEE3"/>
+                </a:solidFill>
+                <a:latin typeface="Be Vietnam Pro" pitchFamily="34" charset="0"/>
+                <a:ea typeface="Be Vietnam Pro" pitchFamily="34" charset="-122"/>
+                <a:cs typeface="Be Vietnam Pro" pitchFamily="34" charset="-120"/>
+              </a:rPr>
+              <a:t> cầu,</a:t>
+            </a:r>
+            <a:r>
+              <a:rPr lang="en-US" sz="3300" b="1" dirty="0" spc="-2" kern="0">
+                <a:solidFill>
+                  <a:srgbClr val="F3EEE3"/>
+                </a:solidFill>
+                <a:latin typeface="Be Vietnam Pro" pitchFamily="34" charset="0"/>
+                <a:ea typeface="Be Vietnam Pro" pitchFamily="34" charset="-122"/>
+                <a:cs typeface="Be Vietnam Pro" pitchFamily="34" charset="-120"/>
+              </a:rPr>
+              <a:t> khi</a:t>
+            </a:r>
+            <a:r>
+              <a:rPr lang="en-US" sz="3300" b="1" dirty="0" spc="-10" kern="0">
+                <a:solidFill>
+                  <a:srgbClr val="F3EEE3"/>
+                </a:solidFill>
+                <a:latin typeface="Be Vietnam Pro" pitchFamily="34" charset="0"/>
+                <a:ea typeface="Be Vietnam Pro" pitchFamily="34" charset="-122"/>
+                <a:cs typeface="Be Vietnam Pro" pitchFamily="34" charset="-120"/>
+              </a:rPr>
+              <a:t> bốn</a:t>
+            </a:r>
+            <a:r>
+              <a:rPr lang="en-US" sz="3300" b="1" dirty="0" spc="-1" kern="0">
+                <a:solidFill>
+                  <a:srgbClr val="F3EEE3"/>
+                </a:solidFill>
+                <a:latin typeface="Be Vietnam Pro" pitchFamily="34" charset="0"/>
+                <a:ea typeface="Be Vietnam Pro" pitchFamily="34" charset="-122"/>
+                <a:cs typeface="Be Vietnam Pro" pitchFamily="34" charset="-120"/>
+              </a:rPr>
+              <a:t> dịch</a:t>
+            </a:r>
+            <a:r>
+              <a:rPr lang="en-US" sz="3300" b="1" dirty="0" spc="-4" kern="0">
+                <a:solidFill>
+                  <a:srgbClr val="F3EEE3"/>
+                </a:solidFill>
+                <a:latin typeface="Be Vietnam Pro" pitchFamily="34" charset="0"/>
+                <a:ea typeface="Be Vietnam Pro" pitchFamily="34" charset="-122"/>
+                <a:cs typeface="Be Vietnam Pro" pitchFamily="34" charset="-120"/>
+              </a:rPr>
+              <a:t> vụ</a:t>
             </a:r>
             <a:r>
               <a:rPr lang="en-US" sz="3300" b="1" dirty="0" spc="-7" kern="0">
@@ -12317,10 +12394,10 @@
                 <a:ea typeface="Be Vietnam Pro" pitchFamily="34" charset="-122"/>
                 <a:cs typeface="Be Vietnam Pro" pitchFamily="34" charset="-120"/>
               </a:rPr>
-              <a:t> mỗi</a:t>
-            </a:r>
-            <a:r>
-              <a:rPr lang="en-US" sz="3300" b="1" dirty="0" spc="-28" kern="0">
+              <a:t> nối</a:t>
+            </a:r>
+            <a:r>
+              <a:rPr lang="en-US" sz="3300" b="1" dirty="0" spc="-2" kern="0">
                 <a:solidFill>
                   <a:srgbClr val="F3EEE3"/>
                 </a:solidFill>
@@ -12328,10 +12405,10 @@
                 <a:ea typeface="Be Vietnam Pro" pitchFamily="34" charset="-122"/>
                 <a:cs typeface="Be Vietnam Pro" pitchFamily="34" charset="-120"/>
               </a:rPr>
-              <a:t> yêu</a:t>
-            </a:r>
-            <a:r>
-              <a:rPr lang="en-US" sz="3300" b="1" dirty="0" spc="1" kern="0">
+              <a:t> nhau</a:t>
+            </a:r>
+            <a:r>
+              <a:rPr lang="en-US" sz="3300" b="1" dirty="0" spc="-6" kern="0">
                 <a:solidFill>
                   <a:srgbClr val="F3EEE3"/>
                 </a:solidFill>
@@ -12339,10 +12416,10 @@
                 <a:ea typeface="Be Vietnam Pro" pitchFamily="34" charset="-122"/>
                 <a:cs typeface="Be Vietnam Pro" pitchFamily="34" charset="-120"/>
               </a:rPr>
-              <a:t> cầu,</a:t>
-            </a:r>
-            <a:r>
-              <a:rPr lang="en-US" sz="3300" b="1" dirty="0" spc="-1" kern="0">
+              <a:t> (ba</a:t>
+            </a:r>
+            <a:r>
+              <a:rPr lang="en-US" sz="3300" b="1" dirty="0" spc="11" kern="0">
                 <a:solidFill>
                   <a:srgbClr val="F3EEE3"/>
                 </a:solidFill>
@@ -12350,10 +12427,10 @@
                 <a:ea typeface="Be Vietnam Pro" pitchFamily="34" charset="-122"/>
                 <a:cs typeface="Be Vietnam Pro" pitchFamily="34" charset="-120"/>
               </a:rPr>
-              <a:t> khi</a:t>
-            </a:r>
-            <a:r>
-              <a:rPr lang="en-US" sz="3300" b="1" dirty="0" spc="-7" kern="0">
+              <a:t> bước)</a:t>
+            </a:r>
+            <a:r>
+              <a:rPr lang="en-US" sz="3300" b="1" dirty="0" spc="-6" kern="0">
                 <a:solidFill>
                   <a:srgbClr val="F3EEE3"/>
                 </a:solidFill>
@@ -12361,10 +12438,10 @@
                 <a:ea typeface="Be Vietnam Pro" pitchFamily="34" charset="-122"/>
                 <a:cs typeface="Be Vietnam Pro" pitchFamily="34" charset="-120"/>
               </a:rPr>
-              <a:t> ba</a:t>
-            </a:r>
-            <a:r>
-              <a:rPr lang="en-US" sz="3300" b="1" dirty="0" spc="-9" kern="0">
+              <a:t> cùng</a:t>
+            </a:r>
+            <a:r>
+              <a:rPr lang="en-US" sz="3300" b="1" dirty="0" spc="-5" kern="0">
                 <a:solidFill>
                   <a:srgbClr val="F3EEE3"/>
                 </a:solidFill>
@@ -12372,10 +12449,10 @@
                 <a:ea typeface="Be Vietnam Pro" pitchFamily="34" charset="-122"/>
                 <a:cs typeface="Be Vietnam Pro" pitchFamily="34" charset="-120"/>
               </a:rPr>
-              <a:t> tầng</a:t>
-            </a:r>
-            <a:r>
-              <a:rPr lang="en-US" sz="3300" b="1" dirty="0" spc="-6" kern="0">
+              <a:t> thử</a:t>
+            </a:r>
+            <a:r>
+              <a:rPr lang="en-US" sz="3300" b="1" dirty="0" spc="-2" kern="0">
                 <a:solidFill>
                   <a:srgbClr val="F3EEE3"/>
                 </a:solidFill>
@@ -12383,43 +12460,21 @@
                 <a:ea typeface="Be Vietnam Pro" pitchFamily="34" charset="-122"/>
                 <a:cs typeface="Be Vietnam Pro" pitchFamily="34" charset="-120"/>
               </a:rPr>
-              <a:t> cùng</a:t>
+              <a:t> lại</a:t>
+            </a:r>
+            <a:r>
+              <a:rPr lang="en-US" sz="3300" b="1" dirty="0" spc="-5" kern="0">
+                <a:solidFill>
+                  <a:srgbClr val="F3EEE3"/>
+                </a:solidFill>
+                <a:latin typeface="Be Vietnam Pro" pitchFamily="34" charset="0"/>
+                <a:ea typeface="Be Vietnam Pro" pitchFamily="34" charset="-122"/>
+                <a:cs typeface="Be Vietnam Pro" pitchFamily="34" charset="-120"/>
+              </a:rPr>
+              <a:t> 3</a:t>
             </a:r>
             <a:r>
               <a:rPr lang="en-US" sz="3300" b="1" dirty="0" spc="-4" kern="0">
-                <a:solidFill>
-                  <a:srgbClr val="F3EEE3"/>
-                </a:solidFill>
-                <a:latin typeface="Be Vietnam Pro" pitchFamily="34" charset="0"/>
-                <a:ea typeface="Be Vietnam Pro" pitchFamily="34" charset="-122"/>
-                <a:cs typeface="Be Vietnam Pro" pitchFamily="34" charset="-120"/>
-              </a:rPr>
-              <a:t> thử</a:t>
-            </a:r>
-            <a:r>
-              <a:rPr lang="en-US" sz="3300" b="1" dirty="0" spc="-3" kern="0">
-                <a:solidFill>
-                  <a:srgbClr val="F3EEE3"/>
-                </a:solidFill>
-                <a:latin typeface="Be Vietnam Pro" pitchFamily="34" charset="0"/>
-                <a:ea typeface="Be Vietnam Pro" pitchFamily="34" charset="-122"/>
-                <a:cs typeface="Be Vietnam Pro" pitchFamily="34" charset="-120"/>
-              </a:rPr>
-              <a:t> lại</a:t>
-            </a:r>
-            <a:r>
-              <a:rPr lang="en-US" sz="3300" b="1" dirty="0" spc="-5" kern="0">
-                <a:solidFill>
-                  <a:srgbClr val="F3EEE3"/>
-                </a:solidFill>
-                <a:latin typeface="Be Vietnam Pro" pitchFamily="34" charset="0"/>
-                <a:ea typeface="Be Vietnam Pro" pitchFamily="34" charset="-122"/>
-                <a:cs typeface="Be Vietnam Pro" pitchFamily="34" charset="-120"/>
-              </a:rPr>
-              <a:t> 3</a:t>
-            </a:r>
-            <a:r>
-              <a:rPr lang="en-US" sz="3300" b="1" dirty="0" spc="-3" kern="0">
                 <a:solidFill>
                   <a:srgbClr val="F3EEE3"/>
                 </a:solidFill>
@@ -12457,7 +12512,7 @@
       </p:sp>
       <p:sp>
         <p:nvSpPr>
-          <p:cNvPr id="7" name="Text richtext-1792423144755-656030128"/>
+          <p:cNvPr id="7" name="Text 5"/>
           <p:cNvSpPr/>
           <p:nvPr/>
         </p:nvSpPr>
@@ -12476,13 +12531,11 @@
           <a:bodyPr wrap="square" lIns="0" tIns="-2429" rIns="0" bIns="2429" rtlCol="0" anchor="ctr"/>
           <a:lstStyle/>
           <a:p>
-            <a:pPr algn="l" marL="323850" indent="-231371">
+            <a:pPr algn="l" indent="0" marL="0">
               <a:lnSpc>
                 <a:spcPts val="3825"/>
               </a:lnSpc>
-              <a:buSzPct val="100000"/>
-              <a:buFont typeface="Arial"/>
-              <a:buChar char="•"/>
+              <a:buNone/>
             </a:pPr>
             <a:r>
               <a:rPr lang="en-US" sz="2550" dirty="0" spc="-1" kern="0">
@@ -12553,13 +12606,11 @@
             <a:endParaRPr lang="en-US" sz="2550" dirty="0"/>
           </a:p>
           <a:p>
-            <a:pPr algn="l" marL="323850" indent="-231371">
+            <a:pPr algn="l" indent="0" marL="0">
               <a:lnSpc>
                 <a:spcPts val="3825"/>
               </a:lnSpc>
-              <a:buSzPct val="100000"/>
-              <a:buFont typeface="Arial"/>
-              <a:buChar char="•"/>
+              <a:buNone/>
             </a:pPr>
             <a:r>
               <a:rPr lang="en-US" sz="2550" dirty="0" spc="-1" kern="0">
@@ -12619,16 +12670,14 @@
             <a:endParaRPr lang="en-US" sz="2550" dirty="0"/>
           </a:p>
           <a:p>
-            <a:pPr algn="l" marL="323850" indent="-231371">
+            <a:pPr algn="l" indent="0" marL="0">
               <a:lnSpc>
                 <a:spcPts val="3825"/>
               </a:lnSpc>
-              <a:buSzPct val="100000"/>
-              <a:buFont typeface="Arial"/>
-              <a:buChar char="•"/>
+              <a:buNone/>
             </a:pPr>
             <a:r>
-              <a:rPr lang="en-US" sz="2550" dirty="0" spc="3" kern="0">
+              <a:rPr lang="en-US" sz="2550" dirty="0" spc="2" kern="0">
                 <a:solidFill>
                   <a:srgbClr val="E4E1D8"/>
                 </a:solidFill>
@@ -12636,10 +12685,10 @@
                 <a:ea typeface="Be Vietnam Pro" pitchFamily="34" charset="-122"/>
                 <a:cs typeface="Be Vietnam Pro" pitchFamily="34" charset="-120"/>
               </a:rPr>
-              <a:t>Ba</a:t>
-            </a:r>
-            <a:r>
-              <a:rPr lang="en-US" sz="2550" dirty="0" spc="-7" kern="0">
+              <a:t>Bốn</a:t>
+            </a:r>
+            <a:r>
+              <a:rPr lang="en-US" sz="2550" dirty="0" spc="0" kern="0">
                 <a:solidFill>
                   <a:srgbClr val="E4E1D8"/>
                 </a:solidFill>
@@ -12647,7 +12696,18 @@
                 <a:ea typeface="Be Vietnam Pro" pitchFamily="34" charset="-122"/>
                 <a:cs typeface="Be Vietnam Pro" pitchFamily="34" charset="-120"/>
               </a:rPr>
-              <a:t> tầng:</a:t>
+              <a:t> dịch</a:t>
+            </a:r>
+            <a:r>
+              <a:rPr lang="en-US" sz="2550" dirty="0" spc="-2" kern="0">
+                <a:solidFill>
+                  <a:srgbClr val="E4E1D8"/>
+                </a:solidFill>
+                <a:latin typeface="Be Vietnam Pro" pitchFamily="34" charset="0"/>
+                <a:ea typeface="Be Vietnam Pro" pitchFamily="34" charset="-122"/>
+                <a:cs typeface="Be Vietnam Pro" pitchFamily="34" charset="-120"/>
+              </a:rPr>
+              <a:t> vụ:</a:t>
             </a:r>
             <a:r>
               <a:rPr lang="en-US" sz="2550" dirty="0" spc="-1" kern="0">
